--- a/DS PPTS.pptx
+++ b/DS PPTS.pptx
@@ -2443,7 +2443,7 @@
           <a:p>
             <a:fld id="{E3A666E0-C270-4F2D-A5DC-96BE795B540E}" type="datetimeFigureOut">
               <a:rPr lang="en-US" smtClean="0"/>
-              <a:t>9/11/2026</a:t>
+              <a:t>9/18/2026</a:t>
             </a:fld>
             <a:endParaRPr lang="en-US"/>
           </a:p>
@@ -3032,7 +3032,7 @@
           <a:p>
             <a:fld id="{E227863A-4956-4659-9192-3D74DA4F7578}" type="datetimeFigureOut">
               <a:rPr lang="en-US" smtClean="0"/>
-              <a:t>9/11/2026</a:t>
+              <a:t>9/18/2026</a:t>
             </a:fld>
             <a:endParaRPr lang="en-US"/>
           </a:p>
@@ -3230,7 +3230,7 @@
           <a:p>
             <a:fld id="{E227863A-4956-4659-9192-3D74DA4F7578}" type="datetimeFigureOut">
               <a:rPr lang="en-US" smtClean="0"/>
-              <a:t>9/11/2026</a:t>
+              <a:t>9/18/2026</a:t>
             </a:fld>
             <a:endParaRPr lang="en-US"/>
           </a:p>
@@ -3438,7 +3438,7 @@
           <a:p>
             <a:fld id="{E227863A-4956-4659-9192-3D74DA4F7578}" type="datetimeFigureOut">
               <a:rPr lang="en-US" smtClean="0"/>
-              <a:t>9/11/2026</a:t>
+              <a:t>9/18/2026</a:t>
             </a:fld>
             <a:endParaRPr lang="en-US"/>
           </a:p>
@@ -3642,7 +3642,7 @@
           <a:p>
             <a:fld id="{31F6EA6A-8FF5-49DF-BDDD-F7431B447D8F}" type="datetime3">
               <a:rPr lang="en-US" smtClean="0"/>
-              <a:t>11 September 2026</a:t>
+              <a:t>18 September 2026</a:t>
             </a:fld>
             <a:endParaRPr lang="en-IN"/>
           </a:p>
@@ -3815,7 +3815,7 @@
           <a:p>
             <a:fld id="{CF411EB6-9770-43AB-BBCE-044F1DB66B82}" type="datetime3">
               <a:rPr lang="en-US" smtClean="0"/>
-              <a:t>11 September 2026</a:t>
+              <a:t>18 September 2026</a:t>
             </a:fld>
             <a:endParaRPr lang="en-IN"/>
           </a:p>
@@ -4064,7 +4064,7 @@
           <a:p>
             <a:fld id="{BDC905DC-9CDD-41AE-979C-F366BC0443ED}" type="datetime3">
               <a:rPr lang="en-US" smtClean="0"/>
-              <a:t>11 September 2026</a:t>
+              <a:t>18 September 2026</a:t>
             </a:fld>
             <a:endParaRPr lang="en-IN"/>
           </a:p>
@@ -4299,7 +4299,7 @@
           <a:p>
             <a:fld id="{384FAC05-A025-4B8A-AB88-2AE8812F8A48}" type="datetime3">
               <a:rPr lang="en-US" smtClean="0"/>
-              <a:t>11 September 2026</a:t>
+              <a:t>18 September 2026</a:t>
             </a:fld>
             <a:endParaRPr lang="en-IN"/>
           </a:p>
@@ -4669,7 +4669,7 @@
           <a:p>
             <a:fld id="{187906D5-6813-455D-BAA0-28A983958C32}" type="datetime3">
               <a:rPr lang="en-US" smtClean="0"/>
-              <a:t>11 September 2026</a:t>
+              <a:t>18 September 2026</a:t>
             </a:fld>
             <a:endParaRPr lang="en-IN"/>
           </a:p>
@@ -4790,7 +4790,7 @@
           <a:p>
             <a:fld id="{BF4309C4-DF5F-4FAA-9214-A2117415D598}" type="datetime3">
               <a:rPr lang="en-US" smtClean="0"/>
-              <a:t>11 September 2026</a:t>
+              <a:t>18 September 2026</a:t>
             </a:fld>
             <a:endParaRPr lang="en-IN"/>
           </a:p>
@@ -4888,7 +4888,7 @@
           <a:p>
             <a:fld id="{C4683E30-D762-4164-BBF9-9799116ED611}" type="datetime3">
               <a:rPr lang="en-US" smtClean="0"/>
-              <a:t>11 September 2026</a:t>
+              <a:t>18 September 2026</a:t>
             </a:fld>
             <a:endParaRPr lang="en-IN"/>
           </a:p>
@@ -5168,7 +5168,7 @@
           <a:p>
             <a:fld id="{C7EEB4AA-F6FE-4EF1-9FE6-D5606E858D35}" type="datetime3">
               <a:rPr lang="en-US" smtClean="0"/>
-              <a:t>11 September 2026</a:t>
+              <a:t>18 September 2026</a:t>
             </a:fld>
             <a:endParaRPr lang="en-IN"/>
           </a:p>
@@ -5357,7 +5357,7 @@
           <a:p>
             <a:fld id="{E227863A-4956-4659-9192-3D74DA4F7578}" type="datetimeFigureOut">
               <a:rPr lang="en-US" smtClean="0"/>
-              <a:t>9/11/2026</a:t>
+              <a:t>9/18/2026</a:t>
             </a:fld>
             <a:endParaRPr lang="en-US"/>
           </a:p>
@@ -5626,7 +5626,7 @@
           <a:p>
             <a:fld id="{97B547F9-D0DE-4919-BAA4-23065C38E70B}" type="datetime3">
               <a:rPr lang="en-US" smtClean="0"/>
-              <a:t>11 September 2026</a:t>
+              <a:t>18 September 2026</a:t>
             </a:fld>
             <a:endParaRPr lang="en-IN"/>
           </a:p>
@@ -5799,7 +5799,7 @@
           <a:p>
             <a:fld id="{830D9772-7494-4C65-A0D8-1FBD740B2E65}" type="datetime3">
               <a:rPr lang="en-US" smtClean="0"/>
-              <a:t>11 September 2026</a:t>
+              <a:t>18 September 2026</a:t>
             </a:fld>
             <a:endParaRPr lang="en-IN"/>
           </a:p>
@@ -5982,7 +5982,7 @@
           <a:p>
             <a:fld id="{CBB089DC-0019-49C7-8AD2-EF5D896393D8}" type="datetime3">
               <a:rPr lang="en-US" smtClean="0"/>
-              <a:t>11 September 2026</a:t>
+              <a:t>18 September 2026</a:t>
             </a:fld>
             <a:endParaRPr lang="en-IN"/>
           </a:p>
@@ -6248,7 +6248,7 @@
           <a:p>
             <a:fld id="{E227863A-4956-4659-9192-3D74DA4F7578}" type="datetimeFigureOut">
               <a:rPr lang="en-US" smtClean="0"/>
-              <a:t>9/11/2026</a:t>
+              <a:t>9/18/2026</a:t>
             </a:fld>
             <a:endParaRPr lang="en-US"/>
           </a:p>
@@ -6513,7 +6513,7 @@
           <a:p>
             <a:fld id="{E227863A-4956-4659-9192-3D74DA4F7578}" type="datetimeFigureOut">
               <a:rPr lang="en-US" smtClean="0"/>
-              <a:t>9/11/2026</a:t>
+              <a:t>9/18/2026</a:t>
             </a:fld>
             <a:endParaRPr lang="en-US"/>
           </a:p>
@@ -6925,7 +6925,7 @@
           <a:p>
             <a:fld id="{E227863A-4956-4659-9192-3D74DA4F7578}" type="datetimeFigureOut">
               <a:rPr lang="en-US" smtClean="0"/>
-              <a:t>9/11/2026</a:t>
+              <a:t>9/18/2026</a:t>
             </a:fld>
             <a:endParaRPr lang="en-US"/>
           </a:p>
@@ -7066,7 +7066,7 @@
           <a:p>
             <a:fld id="{E227863A-4956-4659-9192-3D74DA4F7578}" type="datetimeFigureOut">
               <a:rPr lang="en-US" smtClean="0"/>
-              <a:t>9/11/2026</a:t>
+              <a:t>9/18/2026</a:t>
             </a:fld>
             <a:endParaRPr lang="en-US"/>
           </a:p>
@@ -7179,7 +7179,7 @@
           <a:p>
             <a:fld id="{E227863A-4956-4659-9192-3D74DA4F7578}" type="datetimeFigureOut">
               <a:rPr lang="en-US" smtClean="0"/>
-              <a:t>9/11/2026</a:t>
+              <a:t>9/18/2026</a:t>
             </a:fld>
             <a:endParaRPr lang="en-US"/>
           </a:p>
@@ -7490,7 +7490,7 @@
           <a:p>
             <a:fld id="{E227863A-4956-4659-9192-3D74DA4F7578}" type="datetimeFigureOut">
               <a:rPr lang="en-US" smtClean="0"/>
-              <a:t>9/11/2026</a:t>
+              <a:t>9/18/2026</a:t>
             </a:fld>
             <a:endParaRPr lang="en-US"/>
           </a:p>
@@ -7778,7 +7778,7 @@
           <a:p>
             <a:fld id="{E227863A-4956-4659-9192-3D74DA4F7578}" type="datetimeFigureOut">
               <a:rPr lang="en-US" smtClean="0"/>
-              <a:t>9/11/2026</a:t>
+              <a:t>9/18/2026</a:t>
             </a:fld>
             <a:endParaRPr lang="en-US"/>
           </a:p>
@@ -8019,7 +8019,7 @@
           <a:p>
             <a:fld id="{E227863A-4956-4659-9192-3D74DA4F7578}" type="datetimeFigureOut">
               <a:rPr lang="en-US" smtClean="0"/>
-              <a:t>9/11/2026</a:t>
+              <a:t>9/18/2026</a:t>
             </a:fld>
             <a:endParaRPr lang="en-US"/>
           </a:p>
@@ -8571,7 +8571,7 @@
           <a:p>
             <a:fld id="{DE16266A-CA82-4709-A4C2-B8B2AD8F4816}" type="datetime3">
               <a:rPr lang="en-US" smtClean="0"/>
-              <a:t>11 September 2026</a:t>
+              <a:t>18 September 2026</a:t>
             </a:fld>
             <a:endParaRPr lang="en-IN"/>
           </a:p>
@@ -9686,7 +9686,7 @@
           <a:p>
             <a:r>
               <a:rPr lang="en-IN" b="1" dirty="0"/>
-              <a:t>SOA Project Review-1</a:t>
+              <a:t>Data Science Project Review-2</a:t>
             </a:r>
           </a:p>
         </p:txBody>
@@ -9712,11 +9712,10 @@
           <a:bodyPr/>
           <a:lstStyle/>
           <a:p>
-            <a:fld id="{01AD1135-6E10-4422-AC8B-257B84239C9C}" type="slidenum">
-              <a:rPr lang="en-IN" smtClean="0"/>
+            <a:r>
+              <a:rPr lang="en-IN" dirty="0"/>
               <a:t>1</a:t>
-            </a:fld>
-            <a:endParaRPr lang="en-IN" dirty="0"/>
+            </a:r>
           </a:p>
         </p:txBody>
       </p:sp>
@@ -10005,120 +10004,6 @@
           <a:chExt cx="0" cy="0"/>
         </a:xfrm>
       </p:grpSpPr>
-      <p:sp>
-        <p:nvSpPr>
-          <p:cNvPr id="3" name="Date Placeholder 2">
-            <a:extLst>
-              <a:ext uri="{FF2B5EF4-FFF2-40B4-BE49-F238E27FC236}">
-                <a16:creationId xmlns:a16="http://schemas.microsoft.com/office/drawing/2014/main" id="{B6FAE64B-DFA9-4528-D74E-DAEA88C008D5}"/>
-              </a:ext>
-            </a:extLst>
-          </p:cNvPr>
-          <p:cNvSpPr>
-            <a:spLocks noGrp="1"/>
-          </p:cNvSpPr>
-          <p:nvPr>
-            <p:ph type="dt" sz="half" idx="10"/>
-          </p:nvPr>
-        </p:nvSpPr>
-        <p:spPr/>
-        <p:txBody>
-          <a:bodyPr/>
-          <a:lstStyle/>
-          <a:p>
-            <a:pPr marL="0" marR="0" lvl="0" indent="0" algn="l" defTabSz="457200" rtl="0" eaLnBrk="1" fontAlgn="auto" latinLnBrk="0" hangingPunct="1">
-              <a:lnSpc>
-                <a:spcPct val="100000"/>
-              </a:lnSpc>
-              <a:spcBef>
-                <a:spcPts val="0"/>
-              </a:spcBef>
-              <a:spcAft>
-                <a:spcPts val="0"/>
-              </a:spcAft>
-              <a:buClrTx/>
-              <a:buSzTx/>
-              <a:buFontTx/>
-              <a:buNone/>
-              <a:tabLst/>
-              <a:defRPr/>
-            </a:pPr>
-            <a:endParaRPr kumimoji="0" lang="en-IN" sz="1200" b="0" i="0" u="none" strike="noStrike" kern="1200" cap="none" spc="0" normalizeH="0" baseline="0" noProof="0" dirty="0">
-              <a:ln>
-                <a:noFill/>
-              </a:ln>
-              <a:solidFill>
-                <a:prstClr val="black">
-                  <a:tint val="75000"/>
-                </a:prstClr>
-              </a:solidFill>
-              <a:effectLst/>
-              <a:uLnTx/>
-              <a:uFillTx/>
-              <a:latin typeface="Calibri" panose="020F0502020204030204"/>
-              <a:ea typeface="+mn-ea"/>
-              <a:cs typeface="+mn-cs"/>
-            </a:endParaRPr>
-          </a:p>
-        </p:txBody>
-      </p:sp>
-      <p:sp>
-        <p:nvSpPr>
-          <p:cNvPr id="4" name="Footer Placeholder 3">
-            <a:extLst>
-              <a:ext uri="{FF2B5EF4-FFF2-40B4-BE49-F238E27FC236}">
-                <a16:creationId xmlns:a16="http://schemas.microsoft.com/office/drawing/2014/main" id="{41222DE7-17C6-1B7E-71C0-2347B0AA2C6B}"/>
-              </a:ext>
-            </a:extLst>
-          </p:cNvPr>
-          <p:cNvSpPr>
-            <a:spLocks noGrp="1"/>
-          </p:cNvSpPr>
-          <p:nvPr>
-            <p:ph type="ftr" sz="quarter" idx="11"/>
-          </p:nvPr>
-        </p:nvSpPr>
-        <p:spPr/>
-        <p:txBody>
-          <a:bodyPr/>
-          <a:lstStyle/>
-          <a:p>
-            <a:pPr marL="0" marR="0" lvl="0" indent="0" algn="ctr" defTabSz="457200" rtl="0" eaLnBrk="1" fontAlgn="auto" latinLnBrk="0" hangingPunct="1">
-              <a:lnSpc>
-                <a:spcPct val="100000"/>
-              </a:lnSpc>
-              <a:spcBef>
-                <a:spcPts val="0"/>
-              </a:spcBef>
-              <a:spcAft>
-                <a:spcPts val="0"/>
-              </a:spcAft>
-              <a:buClrTx/>
-              <a:buSzTx/>
-              <a:buFontTx/>
-              <a:buNone/>
-              <a:tabLst/>
-              <a:defRPr/>
-            </a:pPr>
-            <a:endParaRPr kumimoji="0" lang="en-IN" sz="1200" b="0" i="0" u="none" strike="noStrike" kern="1200" cap="none" spc="0" normalizeH="0" baseline="0" noProof="0" dirty="0">
-              <a:ln>
-                <a:noFill/>
-              </a:ln>
-              <a:solidFill>
-                <a:prstClr val="black">
-                  <a:tint val="75000"/>
-                </a:prstClr>
-              </a:solidFill>
-              <a:effectLst/>
-              <a:uLnTx/>
-              <a:uFillTx/>
-              <a:latin typeface="Calibri" panose="020F0502020204030204"/>
-              <a:ea typeface="+mn-ea"/>
-              <a:cs typeface="+mn-cs"/>
-            </a:endParaRPr>
-          </a:p>
-        </p:txBody>
-      </p:sp>
       <p:sp>
         <p:nvSpPr>
           <p:cNvPr id="5" name="Slide Number Placeholder 4">
@@ -14256,56 +14141,6 @@
       </p:sp>
       <p:sp>
         <p:nvSpPr>
-          <p:cNvPr id="8" name="Date Placeholder 7">
-            <a:extLst>
-              <a:ext uri="{FF2B5EF4-FFF2-40B4-BE49-F238E27FC236}">
-                <a16:creationId xmlns:a16="http://schemas.microsoft.com/office/drawing/2014/main" id="{A0FDE360-66C4-26CA-5DB9-8E99C2685BE0}"/>
-              </a:ext>
-            </a:extLst>
-          </p:cNvPr>
-          <p:cNvSpPr>
-            <a:spLocks noGrp="1"/>
-          </p:cNvSpPr>
-          <p:nvPr>
-            <p:ph type="dt" sz="half" idx="10"/>
-          </p:nvPr>
-        </p:nvSpPr>
-        <p:spPr/>
-        <p:txBody>
-          <a:bodyPr/>
-          <a:lstStyle/>
-          <a:p>
-            <a:endParaRPr lang="en-IN" dirty="0"/>
-          </a:p>
-        </p:txBody>
-      </p:sp>
-      <p:sp>
-        <p:nvSpPr>
-          <p:cNvPr id="9" name="Footer Placeholder 8">
-            <a:extLst>
-              <a:ext uri="{FF2B5EF4-FFF2-40B4-BE49-F238E27FC236}">
-                <a16:creationId xmlns:a16="http://schemas.microsoft.com/office/drawing/2014/main" id="{0F095753-622E-2BA7-9495-60F9B6E57FDB}"/>
-              </a:ext>
-            </a:extLst>
-          </p:cNvPr>
-          <p:cNvSpPr>
-            <a:spLocks noGrp="1"/>
-          </p:cNvSpPr>
-          <p:nvPr>
-            <p:ph type="ftr" sz="quarter" idx="11"/>
-          </p:nvPr>
-        </p:nvSpPr>
-        <p:spPr/>
-        <p:txBody>
-          <a:bodyPr/>
-          <a:lstStyle/>
-          <a:p>
-            <a:endParaRPr lang="en-IN" dirty="0"/>
-          </a:p>
-        </p:txBody>
-      </p:sp>
-      <p:sp>
-        <p:nvSpPr>
           <p:cNvPr id="10" name="Slide Number Placeholder 9">
             <a:extLst>
               <a:ext uri="{FF2B5EF4-FFF2-40B4-BE49-F238E27FC236}">
